--- a/Instructor/AI-in-Excel-for-Finance-IOFM-UPDATED.pptx
+++ b/Instructor/AI-in-Excel-for-Finance-IOFM-UPDATED.pptx
@@ -610,7 +610,7 @@
           <a:p>
             <a:r>
               <a:rPr lang="en-US" dirty="0"/>
-              <a:t>We're in the ExpenseMemos tab, and each row is a messy, real-sounding expense note. Here's the big idea. The new COPILOT function puts a model right inside a formula. You give it a prompt and a cell, and it returns an answer into the grid. It recalculates like any other function, and it can fill a whole column at once. Let me build a few columns live. First, I'll categorize each memo. Watch that I give it a fixed list of categories to choose from. That one constraint is what makes the answers consistent. Next, I'll pull out the vendor. Then the dollar amount. Then I'll flag any policy concerns for a human to review. While these run, let me be honest about the limits. This is a probabilistic tool, so the answers can shift a little when you run it again. It needs the Copilot license. And it is not a calculator, so the amount column especially needs a human to check it against the receipt. Notice that this is exactly the deterministic versus probabilistic idea from earlier, made real. If it hangs, open the extracted version in your solutions file and read a few of the tricky ones out loud.</a:t>
+              <a:t>We're in the ExpenseMemos tab, and each row is a messy, real-sounding expense note. Here's the big idea. The new COPILOT function puts a model right inside a formula. You give it a prompt and a cell, and it returns an answer into the grid. It recalculates like any other function, and it can fill a whole column at once. Let me build a few columns live. First, I'll categorize each memo. Watch that I give it a fixed list of categories to choose from. That one constraint is what makes the answers consistent. Next, I'll pull out the vendor. Then the dollar amount. Then I'll flag any policy concerns. And here is a key point: because this function is vanilla, it only knows what is in the prompt, so I actually type our limits right into it, the seventy-five dollar meal cap, the hundred dollar gift cap, and so on. If I want it to know a rule, the rule goes in the prompt. While these run, let me be honest about the limits. This is a probabilistic tool, so the answers can shift a little when you run it again. It needs the Copilot license. And it is not a calculator, so the amount column especially needs a human to check it against the receipt. Notice that this is exactly the deterministic versus probabilistic idea from earlier, made real. If it hangs, open the extracted version in your solutions file and read a few of the tricky ones out loud.</a:t>
             </a:r>
             <a:endParaRPr lang="en-US" dirty="0"/>
           </a:p>
@@ -1138,7 +1138,7 @@
           <a:p>
             <a:r>
               <a:rPr lang="en-US" dirty="0"/>
-              <a:t>Here are the three levers, and the trick is knowing which one you want. First, custom instructions. Think of these as your house style. You set your preferences once, and Copilot applies them across your workbooks. Formats, naming, how you label a variance. If you want that inside a single file, you can use a rules sheet. Second, Skills. These are saved workflows. You package a task you do all the time, give it a name, and everyone on the team runs it the same way. Third, reference files. This is how you point Copilot at your other data, like last month's close file or your chart of accounts, so it grounds its answer in the real thing. The bottom line is on the screen. Instructions shape how it behaves. Skills save what it does. Reference files give it what to look at.</a:t>
+              <a:t>Here are the three levers, and the trick is knowing which one you want. First, custom instructions, your house style, set once and applied across your workbooks. Second, Skills, saved workflows you package and then reuse by name. Third, reference files, where you point Copilot at other data so it grounds its answer in the real thing. Now here is the important caveat, and it is easy to miss. All three of these shape the Copilot chat and the agents, the conversational side. They do not feed the equals COPILOT worksheet function we used earlier. That function is vanilla. It sees your prompt and the cells you hand it, and nothing else. So for the function, you put your rules in the prompt. For the chat, you can set instructions and attach files. To show the chat side cleanly, I am switching to a completely different dataset, some regional sales numbers.</a:t>
             </a:r>
             <a:endParaRPr lang="en-US" dirty="0"/>
           </a:p>
@@ -1226,7 +1226,7 @@
           <a:p>
             <a:r>
               <a:rPr lang="en-US" dirty="0"/>
-              <a:t>Here is the before and after, and this is the part people find surprising. On the left is what Copilot gives you by default. A wordy summary, currency with cents, variances as plus signs. On the right is the same prompt, on the same data, after I set one standing instruction. Currency with no cents. Variances labeled Favorable or Unfavorable. And the answer delivered as three clean bullets that lead with the number. I did not touch the prompt. I set the house style once, and now every answer arrives the way my team wants to read it.</a:t>
+              <a:t>Now the chat side, and notice I have switched to a completely different dataset, regional sales. That is deliberate, because these customization features are a chat thing, not a function thing. On the left is the default. A wordy paragraph, dollars with cents, percentages with no label. On the right is the same request, after I set one standing instruction in Copilot. Whole dollars, a Growth or Decline label on every change, and three number-first bullets. Same prompt, same data. I set the house style once, and now the answer arrives the way my team reads it.</a:t>
             </a:r>
             <a:endParaRPr lang="en-US" dirty="0"/>
           </a:p>
@@ -1314,7 +1314,7 @@
           <a:p>
             <a:r>
               <a:rPr lang="en-US" dirty="0"/>
-              <a:t>Now watch what a reference file does. Same idea, but this time I am not changing the style, I am changing what Copilot knows. On the left, the policy flags are vague. Might be over a limit. Possible issue. Useful, but generic. Then I attach our expense policy through the file picker and re-run. On the right, the flags now cite our actual numbers. Ninety dollars a head is over the seventy-five dollar limit. Five hundred dollars exceeds the hundred-dollar-per-vendor gift limit, and it points to the policy section. Same for a codebook or a data-visualization style guide. Give Copilot the document that holds your rules, and it grounds its answer in your rules instead of guessing.</a:t>
+              <a:t>And here is a reference file, still on the sales data, still in the chat. This time I am not setting a style, I am handing Copilot a document, our reporting and chart style guide. Watch the before. A generic summary and a plain blue chart. Then I attach the style guide through the file picker and ask again. Now the summary is three number-first bullets with Growth and Decline labels, and the chart uses our brand red, sorted high to low, with data labels, exactly what the guide specifies. A policy, a codebook, a style guide, whatever holds your rules, the chat can read it and follow it. The function cannot, and that is the whole reason we keep these two ideas separate.</a:t>
             </a:r>
             <a:endParaRPr lang="en-US" dirty="0"/>
           </a:p>
@@ -5559,14 +5559,41 @@
       </p:sp>
       <p:sp>
         <p:nvSpPr>
-          <p:cNvPr id="18" name="Text 16"/>
-          <p:cNvSpPr/>
-          <p:nvPr/>
-        </p:nvSpPr>
-        <p:spPr>
-          <a:xfrm>
-            <a:off x="548640" y="5577840"/>
-            <a:ext cx="10972800" cy="548640"/>
+          <p:cNvPr id="18" name="Shape 16"/>
+          <p:cNvSpPr/>
+          <p:nvPr/>
+        </p:nvSpPr>
+        <p:spPr>
+          <a:xfrm>
+            <a:off x="548640" y="5504688"/>
+            <a:ext cx="10058400" cy="676656"/>
+          </a:xfrm>
+          <a:prstGeom prst="roundRect">
+            <a:avLst>
+              <a:gd name="adj" fmla="val 8108"/>
+            </a:avLst>
+          </a:prstGeom>
+          <a:solidFill>
+            <a:srgbClr val="F3E6E6"/>
+          </a:solidFill>
+          <a:ln w="12700">
+            <a:solidFill>
+              <a:srgbClr val="CF3338"/>
+            </a:solidFill>
+            <a:prstDash val="solid"/>
+          </a:ln>
+        </p:spPr>
+      </p:sp>
+      <p:sp>
+        <p:nvSpPr>
+          <p:cNvPr id="19" name="Text 17"/>
+          <p:cNvSpPr/>
+          <p:nvPr/>
+        </p:nvSpPr>
+        <p:spPr>
+          <a:xfrm>
+            <a:off x="777240" y="5541264"/>
+            <a:ext cx="9601200" cy="603504"/>
           </a:xfrm>
           <a:prstGeom prst="rect">
             <a:avLst/>
@@ -5582,7 +5609,7 @@
               <a:buNone/>
             </a:pPr>
             <a:r>
-              <a:rPr lang="en-US" sz="1500" b="1" dirty="0">
+              <a:rPr lang="en-US" sz="1300" b="1" dirty="0">
                 <a:solidFill>
                   <a:srgbClr val="CF3338"/>
                 </a:solidFill>
@@ -5590,13 +5617,13 @@
                 <a:ea typeface="Arial" pitchFamily="34" charset="-122"/>
                 <a:cs typeface="Arial" pitchFamily="34" charset="-120"/>
               </a:rPr>
-              <a:t>Bottom line:  </a:t>
+              <a:t>Heads up:  </a:t>
             </a:r>
             <a:pPr algn="ctr" indent="0" marL="0">
               <a:buNone/>
             </a:pPr>
             <a:r>
-              <a:rPr lang="en-US" sz="1500" dirty="0">
+              <a:rPr lang="en-US" sz="1300" dirty="0">
                 <a:solidFill>
                   <a:srgbClr val="1F2120"/>
                 </a:solidFill>
@@ -5604,15 +5631,15 @@
                 <a:ea typeface="Arial" pitchFamily="34" charset="-122"/>
                 <a:cs typeface="Arial" pitchFamily="34" charset="-120"/>
               </a:rPr>
-              <a:t>instructions shape how it behaves, Skills save what it does, and reference files give it what to look at.</a:t>
-            </a:r>
-            <a:endParaRPr lang="en-US" sz="1500" dirty="0"/>
+              <a:t>these shape the Copilot chat and agents, not the =COPILOT() worksheet function. The function is vanilla: your prompt plus the cells you point at.</a:t>
+            </a:r>
+            <a:endParaRPr lang="en-US" sz="1300" dirty="0"/>
           </a:p>
         </p:txBody>
       </p:sp>
       <p:pic>
         <p:nvPicPr>
-          <p:cNvPr id="19" name="Image 0" descr="assets/chevron-red.png">    </p:cNvPr>
+          <p:cNvPr id="20" name="Image 0" descr="assets/chevron-red.png">    </p:cNvPr>
           <p:cNvPicPr>
             <a:picLocks noChangeAspect="1"/>
           </p:cNvPicPr>
@@ -5768,7 +5795,7 @@
                 <a:ea typeface="Arial" pitchFamily="34" charset="-122"/>
                 <a:cs typeface="Arial" pitchFamily="34" charset="-120"/>
               </a:rPr>
-              <a:t>Set once:  </a:t>
+              <a:t>Set once (Copilot chat):  </a:t>
             </a:r>
             <a:pPr indent="0" marL="0">
               <a:lnSpc>
@@ -5785,7 +5812,7 @@
                 <a:ea typeface="Arial" pitchFamily="34" charset="-122"/>
                 <a:cs typeface="Arial" pitchFamily="34" charset="-120"/>
               </a:rPr>
-              <a:t>Format currency as $#,##0. Label variances Favorable or Unfavorable. Give summaries as 3 bullets, lead with the number. Never overwrite source data.</a:t>
+              <a:t>Format currency as $#,##0. Label year-over-year change as Growth or Decline. Give summaries as 3 bullets, lead with the number. One decimal on percentages.</a:t>
             </a:r>
             <a:endParaRPr lang="en-US" sz="1300" dirty="0"/>
           </a:p>
@@ -5896,7 +5923,7 @@
                 <a:ea typeface="Arial" pitchFamily="34" charset="-122"/>
                 <a:cs typeface="Arial" pitchFamily="34" charset="-120"/>
               </a:rPr>
-              <a:t>HR-200 variance: 10,429.00 over budget</a:t>
+              <a:t>Revenue was 4,218,500.00 in the West, up 12.3 percent,</a:t>
             </a:r>
             <a:endParaRPr lang="en-US" sz="1350" dirty="0"/>
           </a:p>
@@ -5919,7 +5946,7 @@
                 <a:ea typeface="Arial" pitchFamily="34" charset="-122"/>
                 <a:cs typeface="Arial" pitchFamily="34" charset="-120"/>
               </a:rPr>
-              <a:t>IT-300 variance: 9,151.00 over</a:t>
+              <a:t>the Northeast came in at 3,860,200.00, down 3.0 percent,</a:t>
             </a:r>
             <a:endParaRPr lang="en-US" sz="1350" dirty="0"/>
           </a:p>
@@ -5942,7 +5969,7 @@
                 <a:ea typeface="Arial" pitchFamily="34" charset="-122"/>
                 <a:cs typeface="Arial" pitchFamily="34" charset="-120"/>
               </a:rPr>
-              <a:t>FIN-100 variance: 4,886.00 over</a:t>
+              <a:t>the Southeast was 2,974,300.00…</a:t>
             </a:r>
             <a:endParaRPr lang="en-US" sz="1350" dirty="0"/>
           </a:p>
@@ -5965,7 +5992,7 @@
                 <a:ea typeface="Arial" pitchFamily="34" charset="-122"/>
                 <a:cs typeface="Arial" pitchFamily="34" charset="-120"/>
               </a:rPr>
-              <a:t>(one paragraph, cents, plus signs)</a:t>
+              <a:t>(one paragraph, cents, no labels)</a:t>
             </a:r>
             <a:endParaRPr lang="en-US" sz="1350" dirty="0"/>
           </a:p>
@@ -6073,7 +6100,7 @@
                 <a:ea typeface="Arial" pitchFamily="34" charset="-122"/>
                 <a:cs typeface="Arial" pitchFamily="34" charset="-120"/>
               </a:rPr>
-              <a:t>$10,429 Unfavorable</a:t>
+              <a:t>$4,218,500 West</a:t>
             </a:r>
             <a:pPr indent="0" marL="0">
               <a:lnSpc>
@@ -6093,7 +6120,7 @@
                 <a:ea typeface="Arial" pitchFamily="34" charset="-122"/>
                 <a:cs typeface="Arial" pitchFamily="34" charset="-120"/>
               </a:rPr>
-              <a:t>  · HR-200</a:t>
+              <a:t>  · 12.3% Growth</a:t>
             </a:r>
             <a:endParaRPr lang="en-US" sz="1350" dirty="0"/>
           </a:p>
@@ -6113,7 +6140,7 @@
                 <a:ea typeface="Arial" pitchFamily="34" charset="-122"/>
                 <a:cs typeface="Arial" pitchFamily="34" charset="-120"/>
               </a:rPr>
-              <a:t>$9,151 Unfavorable</a:t>
+              <a:t>$3,860,200 Northeast</a:t>
             </a:r>
             <a:pPr indent="0" marL="0">
               <a:lnSpc>
@@ -6133,7 +6160,7 @@
                 <a:ea typeface="Arial" pitchFamily="34" charset="-122"/>
                 <a:cs typeface="Arial" pitchFamily="34" charset="-120"/>
               </a:rPr>
-              <a:t>  · IT-300</a:t>
+              <a:t>  · 3.0% Decline</a:t>
             </a:r>
             <a:endParaRPr lang="en-US" sz="1350" dirty="0"/>
           </a:p>
@@ -6153,7 +6180,7 @@
                 <a:ea typeface="Arial" pitchFamily="34" charset="-122"/>
                 <a:cs typeface="Arial" pitchFamily="34" charset="-120"/>
               </a:rPr>
-              <a:t>$4,886 Unfavorable</a:t>
+              <a:t>$2,974,300 Southeast</a:t>
             </a:r>
             <a:pPr indent="0" marL="0">
               <a:lnSpc>
@@ -6173,7 +6200,7 @@
                 <a:ea typeface="Arial" pitchFamily="34" charset="-122"/>
                 <a:cs typeface="Arial" pitchFamily="34" charset="-120"/>
               </a:rPr>
-              <a:t>  · FIN-100</a:t>
+              <a:t>  · 14.0% Growth</a:t>
             </a:r>
             <a:endParaRPr lang="en-US" sz="1350" dirty="0"/>
           </a:p>
@@ -6249,7 +6276,7 @@
                 <a:ea typeface="Courier New" pitchFamily="34" charset="-122"/>
                 <a:cs typeface="Courier New" pitchFamily="34" charset="-120"/>
               </a:rPr>
-              <a:t>APMonthly</a:t>
+              <a:t>RegionalSummary  (Sales-by-Region.xlsx) · Copilot chat</a:t>
             </a:r>
             <a:endParaRPr lang="en-US" sz="1400" dirty="0"/>
           </a:p>
@@ -6288,7 +6315,7 @@
                 <a:ea typeface="Arial" pitchFamily="34" charset="-122"/>
                 <a:cs typeface="Arial" pitchFamily="34" charset="-120"/>
               </a:rPr>
-              <a:t>Same prompt, same data. Only the standing instruction changed, and the delivery changed with it.</a:t>
+              <a:t>A different dataset on purpose. Same prompt, same data. Only the standing instruction changed.</a:t>
             </a:r>
             <a:endParaRPr lang="en-US" sz="1250" dirty="0"/>
           </a:p>
@@ -6452,7 +6479,7 @@
                 <a:ea typeface="Arial" pitchFamily="34" charset="-122"/>
                 <a:cs typeface="Arial" pitchFamily="34" charset="-120"/>
               </a:rPr>
-              <a:t>Attach:  </a:t>
+              <a:t>Attach (Copilot chat):  </a:t>
             </a:r>
             <a:pPr indent="0" marL="0">
               <a:lnSpc>
@@ -6469,7 +6496,7 @@
                 <a:ea typeface="Arial" pitchFamily="34" charset="-122"/>
                 <a:cs typeface="Arial" pitchFamily="34" charset="-120"/>
               </a:rPr>
-              <a:t>Expense &amp; Purchasing Policy.docx  (via the Copilot file picker), then re-run the Policy Flag prompt on ExpenseMemos.</a:t>
+              <a:t>Reporting &amp; Chart Style Guide.docx via the file picker, then ask Copilot to summarize and chart RegionalSummary.</a:t>
             </a:r>
             <a:endParaRPr lang="en-US" sz="1300" dirty="0"/>
           </a:p>
@@ -6577,7 +6604,7 @@
                 <a:ea typeface="Arial" pitchFamily="34" charset="-122"/>
                 <a:cs typeface="Arial" pitchFamily="34" charset="-120"/>
               </a:rPr>
-              <a:t>Auditor dinner:</a:t>
+              <a:t>Summary:</a:t>
             </a:r>
             <a:pPr indent="0" marL="0">
               <a:lnSpc>
@@ -6597,7 +6624,7 @@
                 <a:ea typeface="Arial" pitchFamily="34" charset="-122"/>
                 <a:cs typeface="Arial" pitchFamily="34" charset="-120"/>
               </a:rPr>
-              <a:t>  might be over a meal limit, check</a:t>
+              <a:t>  a generic paragraph, mixed formats</a:t>
             </a:r>
             <a:endParaRPr lang="en-US" sz="1350" dirty="0"/>
           </a:p>
@@ -6617,7 +6644,7 @@
                 <a:ea typeface="Arial" pitchFamily="34" charset="-122"/>
                 <a:cs typeface="Arial" pitchFamily="34" charset="-120"/>
               </a:rPr>
-              <a:t>Year-end gift baskets:</a:t>
+              <a:t>Chart:</a:t>
             </a:r>
             <a:pPr indent="0" marL="0">
               <a:lnSpc>
@@ -6637,7 +6664,7 @@
                 <a:ea typeface="Arial" pitchFamily="34" charset="-122"/>
                 <a:cs typeface="Arial" pitchFamily="34" charset="-120"/>
               </a:rPr>
-              <a:t>  possible gift-policy issue</a:t>
+              <a:t>  default blue columns, unsorted</a:t>
             </a:r>
             <a:endParaRPr lang="en-US" sz="1350" dirty="0"/>
           </a:p>
@@ -6652,15 +6679,15 @@
               <a:buNone/>
             </a:pPr>
             <a:r>
-              <a:rPr lang="en-US" sz="1350" b="1" dirty="0">
-                <a:solidFill>
-                  <a:srgbClr val="1F2120"/>
-                </a:solidFill>
-                <a:latin typeface="Arial" pitchFamily="34" charset="0"/>
-                <a:ea typeface="Arial" pitchFamily="34" charset="-122"/>
-                <a:cs typeface="Arial" pitchFamily="34" charset="-120"/>
-              </a:rPr>
-              <a:t>Generic, not grounded in any real limit</a:t>
+              <a:rPr lang="en-US" sz="1350" i="1" dirty="0">
+                <a:solidFill>
+                  <a:srgbClr val="9A9A9A"/>
+                </a:solidFill>
+                <a:latin typeface="Arial" pitchFamily="34" charset="0"/>
+                <a:ea typeface="Arial" pitchFamily="34" charset="-122"/>
+                <a:cs typeface="Arial" pitchFamily="34" charset="-120"/>
+              </a:rPr>
+              <a:t>(follows no house rules)</a:t>
             </a:r>
             <a:endParaRPr lang="en-US" sz="1350" dirty="0"/>
           </a:p>
@@ -6768,7 +6795,7 @@
                 <a:ea typeface="Arial" pitchFamily="34" charset="-122"/>
                 <a:cs typeface="Arial" pitchFamily="34" charset="-120"/>
               </a:rPr>
-              <a:t>Auditor dinner:</a:t>
+              <a:t>Summary:</a:t>
             </a:r>
             <a:pPr indent="0" marL="0">
               <a:lnSpc>
@@ -6788,7 +6815,7 @@
                 <a:ea typeface="Arial" pitchFamily="34" charset="-122"/>
                 <a:cs typeface="Arial" pitchFamily="34" charset="-120"/>
               </a:rPr>
-              <a:t>  $90/head is over the $75 limit (policy 2)</a:t>
+              <a:t>  3 number-first bullets, Growth or Decline</a:t>
             </a:r>
             <a:endParaRPr lang="en-US" sz="1350" dirty="0"/>
           </a:p>
@@ -6808,7 +6835,7 @@
                 <a:ea typeface="Arial" pitchFamily="34" charset="-122"/>
                 <a:cs typeface="Arial" pitchFamily="34" charset="-120"/>
               </a:rPr>
-              <a:t>Gift baskets:</a:t>
+              <a:t>Chart:</a:t>
             </a:r>
             <a:pPr indent="0" marL="0">
               <a:lnSpc>
@@ -6828,7 +6855,7 @@
                 <a:ea typeface="Arial" pitchFamily="34" charset="-122"/>
                 <a:cs typeface="Arial" pitchFamily="34" charset="-120"/>
               </a:rPr>
-              <a:t>  $500 exceeds the $100/vendor limit (policy 3)</a:t>
+              <a:t>  brand red, sorted high to low, labels</a:t>
             </a:r>
             <a:endParaRPr lang="en-US" sz="1350" dirty="0"/>
           </a:p>
@@ -6843,15 +6870,15 @@
               <a:buNone/>
             </a:pPr>
             <a:r>
-              <a:rPr lang="en-US" sz="1350" b="1" dirty="0">
-                <a:solidFill>
-                  <a:srgbClr val="1F2120"/>
-                </a:solidFill>
-                <a:latin typeface="Arial" pitchFamily="34" charset="0"/>
-                <a:ea typeface="Arial" pitchFamily="34" charset="-122"/>
-                <a:cs typeface="Arial" pitchFamily="34" charset="-120"/>
-              </a:rPr>
-              <a:t>Now it cites your actual thresholds</a:t>
+              <a:rPr lang="en-US" sz="1350" i="1" dirty="0">
+                <a:solidFill>
+                  <a:srgbClr val="9A9A9A"/>
+                </a:solidFill>
+                <a:latin typeface="Arial" pitchFamily="34" charset="0"/>
+                <a:ea typeface="Arial" pitchFamily="34" charset="-122"/>
+                <a:cs typeface="Arial" pitchFamily="34" charset="-120"/>
+              </a:rPr>
+              <a:t>(follows your style guide)</a:t>
             </a:r>
             <a:endParaRPr lang="en-US" sz="1350" dirty="0"/>
           </a:p>
@@ -6904,7 +6931,7 @@
                 <a:ea typeface="Courier New" pitchFamily="34" charset="-122"/>
                 <a:cs typeface="Courier New" pitchFamily="34" charset="-120"/>
               </a:rPr>
-              <a:t>ExpenseMemos</a:t>
+              <a:t>RegionalSummary  (Sales-by-Region.xlsx) · Copilot chat</a:t>
             </a:r>
             <a:endParaRPr lang="en-US" sz="1400" dirty="0"/>
           </a:p>
@@ -6943,7 +6970,7 @@
                 <a:ea typeface="Arial" pitchFamily="34" charset="-122"/>
                 <a:cs typeface="Arial" pitchFamily="34" charset="-120"/>
               </a:rPr>
-              <a:t>Point Copilot at a policy, codebook, or style guide, and its answers start following your rules, not the internet's.</a:t>
+              <a:t>A policy, a codebook, or a style guide: give Copilot the document with your rules, and its output follows them.</a:t>
             </a:r>
             <a:endParaRPr lang="en-US" sz="1250" dirty="0"/>
           </a:p>
